--- a/ppt/Choreonoid入門.pptx
+++ b/ppt/Choreonoid入門.pptx
@@ -18875,18 +18875,13 @@
           <a:p>
             <a:pPr algn="l" eaLnBrk="1" hangingPunct="1"/>
             <a:r>
-              <a:rPr lang="ja-JP" altLang="en-US" sz="2000">
+              <a:rPr lang="ja-JP" altLang="en-US" sz="2000" dirty="0">
                 <a:solidFill>
                   <a:srgbClr val="5F5F5F"/>
                 </a:solidFill>
               </a:rPr>
               <a:t>インテリジェントシステム研究部門</a:t>
             </a:r>
-            <a:endParaRPr lang="ja-JP" altLang="en-US" sz="2000" dirty="0">
-              <a:solidFill>
-                <a:srgbClr val="5F5F5F"/>
-              </a:solidFill>
-            </a:endParaRPr>
           </a:p>
         </p:txBody>
       </p:sp>
@@ -31594,7 +31589,23 @@
                   <a:srgbClr val="5F5F5F"/>
                 </a:solidFill>
               </a:rPr>
-              <a:t>もしくは以下のリンク</a:t>
+              <a:t>もしくは以下の</a:t>
+            </a:r>
+            <a:r>
+              <a:rPr lang="en-US" altLang="ja-JP" sz="2000" kern="0" dirty="0">
+                <a:solidFill>
+                  <a:srgbClr val="5F5F5F"/>
+                </a:solidFill>
+              </a:rPr>
+              <a:t>Web</a:t>
+            </a:r>
+            <a:r>
+              <a:rPr lang="ja-JP" altLang="en-US" sz="2000" kern="0">
+                <a:solidFill>
+                  <a:srgbClr val="5F5F5F"/>
+                </a:solidFill>
+              </a:rPr>
+              <a:t>ページ</a:t>
             </a:r>
             <a:endParaRPr lang="en-US" altLang="ja-JP" sz="2000" kern="0" dirty="0">
               <a:solidFill>
@@ -49477,4 +49488,10 @@
   <a:objectDefaults/>
   <a:extraClrSchemeLst/>
 </a:theme>
+</file>
+
+<file path=docMetadata/LabelInfo.xml><?xml version="1.0" encoding="utf-8"?>
+<clbl:labelList xmlns:clbl="http://schemas.microsoft.com/office/2020/mipLabelMetadata">
+  <clbl:label id="{ddc55989-3c9e-4466-8514-eac6f80f6373}" enabled="1" method="Privileged" siteId="{18a7fec8-652f-409b-8369-272d9ce80620}" contentBits="0" removed="0"/>
+</clbl:labelList>
 </file>